--- a/BIS时间同步方案_一页版.pptx
+++ b/BIS时间同步方案_一页版.pptx
@@ -3678,7 +3678,7 @@
                 <a:latin typeface="微软雅黑"/>
                 <a:ea typeface="微软雅黑"/>
               </a:rPr>
-              <a:t>• 鲁棒 —— 中位数估计，对丢包/重传免疫</a:t>
+              <a:t>• 鲁棒 —— trimmed mean 估计，对丢包/重传免疫</a:t>
             </a:r>
           </a:p>
         </p:txBody>

--- a/BIS时间同步方案_一页版.pptx
+++ b/BIS时间同步方案_一页版.pptx
@@ -3678,7 +3678,7 @@
                 <a:latin typeface="微软雅黑"/>
                 <a:ea typeface="微软雅黑"/>
               </a:rPr>
-              <a:t>• 鲁棒 —— trimmed mean 估计，对丢包/重传免疫</a:t>
+              <a:t>• 鲁棒 —— Kalman 新息门限，对丢包/重传免疫</a:t>
             </a:r>
           </a:p>
         </p:txBody>

--- a/BIS时间同步方案_一页版.pptx
+++ b/BIS时间同步方案_一页版.pptx
@@ -3627,7 +3627,7 @@
                 <a:latin typeface="微软雅黑"/>
                 <a:ea typeface="微软雅黑"/>
               </a:rPr>
-              <a:t>• 长期稳定 —— 在线估计晶振漂移(ppm)，失同步自动恢复</a:t>
+              <a:t>• 长期稳定 —— 片上温度自适应 + 在线漂移(ppm)估计</a:t>
             </a:r>
           </a:p>
           <a:p>
